--- a/CorpLaw/13. Directors Duties II.pptx
+++ b/CorpLaw/13. Directors Duties II.pptx
@@ -7459,7 +7459,7 @@
           <a:p>
             <a:fld id="{7E62B2E0-41D4-4BD0-8F27-233CF851A423}" type="datetimeFigureOut">
               <a:rPr lang="en-US" smtClean="0"/>
-              <a:t>10/1/2025</a:t>
+              <a:t>10/8/2026</a:t>
             </a:fld>
             <a:endParaRPr lang="en-US" dirty="0"/>
           </a:p>
@@ -10300,7 +10300,57 @@
           <a:bodyPr/>
           <a:lstStyle/>
           <a:p>
+            <a:r>
+              <a:rPr lang="en-US" dirty="0" err="1"/>
+              <a:t>Intraco</a:t>
+            </a:r>
+            <a:r>
+              <a:rPr lang="en-US" dirty="0"/>
+              <a:t> was owed money by two companies, City Carton and its subsidiary, Box Pak. Both companies were unable to repay their debts. The individuals who controlled these companies also controlled a third company, Multi-Pak.</a:t>
+            </a:r>
+          </a:p>
+          <a:p>
             <a:endParaRPr lang="en-US" dirty="0"/>
+          </a:p>
+          <a:p>
+            <a:r>
+              <a:rPr lang="en-US" dirty="0"/>
+              <a:t>To resolve the problem, the parties agreed to a restructuring. Multi-Pak agreed to purchase City Carton's debt from </a:t>
+            </a:r>
+            <a:r>
+              <a:rPr lang="en-US" dirty="0" err="1"/>
+              <a:t>Intraco</a:t>
+            </a:r>
+            <a:r>
+              <a:rPr lang="en-US" dirty="0"/>
+              <a:t> for S$2.3 million. In return, </a:t>
+            </a:r>
+            <a:r>
+              <a:rPr lang="en-US" dirty="0" err="1"/>
+              <a:t>Intraco</a:t>
+            </a:r>
+            <a:r>
+              <a:rPr lang="en-US" dirty="0"/>
+              <a:t> agreed to invest S$2 million in Multi-Pak by subscribing for its shares and to lend Multi-Pak a further S$371,000.Unfortunately, the restructuring failed, and both City Carton and Multi-Pak subsequently became insolvent.</a:t>
+            </a:r>
+          </a:p>
+          <a:p>
+            <a:endParaRPr lang="en-US" dirty="0"/>
+          </a:p>
+          <a:p>
+            <a:r>
+              <a:rPr lang="en-US" dirty="0"/>
+              <a:t>Multi-Pak's receivers argued that its directors had breached their duty to act in the company's best interests. The central problem was that Multi-Pak had agreed to pay S$2.3 million for debts that were worth only a fraction of that amount. The receivers therefore argued that Multi-Pak's directors had acted improperly by using Multi-Pak's resources to rescue other companies controlled by the same individuals.</a:t>
+            </a:r>
+          </a:p>
+          <a:p>
+            <a:endParaRPr lang="en-US" dirty="0"/>
+          </a:p>
+          <a:p>
+            <a:r>
+              <a:rPr lang="en-US" dirty="0"/>
+              <a:t>Why would Multi-Pak agree to pay S$2.3 million for a debt that was almost worthless?</a:t>
+            </a:r>
           </a:p>
         </p:txBody>
       </p:sp>
@@ -18787,7 +18837,7 @@
           <a:p>
             <a:fld id="{BC9AB8A9-18BE-4EDF-90DD-E48A588FE9E1}" type="datetime1">
               <a:rPr lang="en-US" smtClean="0"/>
-              <a:t>10/1/2025</a:t>
+              <a:t>10/8/2026</a:t>
             </a:fld>
             <a:endParaRPr lang="en-US" dirty="0"/>
           </a:p>
@@ -19056,7 +19106,7 @@
           <a:p>
             <a:fld id="{31C11933-86B0-441A-B639-BD29FDFEFE70}" type="datetime1">
               <a:rPr lang="en-US" smtClean="0"/>
-              <a:t>10/1/2025</a:t>
+              <a:t>10/8/2026</a:t>
             </a:fld>
             <a:endParaRPr lang="en-US" dirty="0"/>
           </a:p>
@@ -19298,7 +19348,7 @@
           <a:p>
             <a:fld id="{74662F02-AFBF-41E7-AC4B-D00C212D7A74}" type="datetime1">
               <a:rPr lang="en-US" smtClean="0"/>
-              <a:t>10/1/2025</a:t>
+              <a:t>10/8/2026</a:t>
             </a:fld>
             <a:endParaRPr lang="en-US" dirty="0"/>
           </a:p>
@@ -19545,7 +19595,7 @@
           <a:p>
             <a:fld id="{5F466308-2A9A-43A3-8189-DAED754C8691}" type="datetime1">
               <a:rPr lang="en-US" smtClean="0"/>
-              <a:t>10/1/2025</a:t>
+              <a:t>10/8/2026</a:t>
             </a:fld>
             <a:endParaRPr lang="en-US" dirty="0"/>
           </a:p>
@@ -19859,7 +19909,7 @@
           <a:p>
             <a:fld id="{FC51178D-1D9D-49FF-BA4D-77D5F3F2ABE7}" type="datetime1">
               <a:rPr lang="en-US" smtClean="0"/>
-              <a:t>10/1/2025</a:t>
+              <a:t>10/8/2026</a:t>
             </a:fld>
             <a:endParaRPr lang="en-US" dirty="0"/>
           </a:p>
@@ -20168,7 +20218,7 @@
           <a:p>
             <a:fld id="{84A73D5F-7352-4D75-84BB-BEEE96694360}" type="datetime1">
               <a:rPr lang="en-US" smtClean="0"/>
-              <a:t>10/1/2025</a:t>
+              <a:t>10/8/2026</a:t>
             </a:fld>
             <a:endParaRPr lang="en-US" dirty="0"/>
           </a:p>
@@ -20597,7 +20647,7 @@
           <a:p>
             <a:fld id="{73AEC2FA-EF00-4A47-8C60-11D9B66273AB}" type="datetime1">
               <a:rPr lang="en-US" smtClean="0"/>
-              <a:t>10/1/2025</a:t>
+              <a:t>10/8/2026</a:t>
             </a:fld>
             <a:endParaRPr lang="en-US" dirty="0"/>
           </a:p>
@@ -20766,7 +20816,7 @@
           <a:p>
             <a:fld id="{69C03762-E4E4-41FB-87AC-4875A8A25370}" type="datetime1">
               <a:rPr lang="en-US" smtClean="0"/>
-              <a:t>10/1/2025</a:t>
+              <a:t>10/8/2026</a:t>
             </a:fld>
             <a:endParaRPr lang="en-US" dirty="0"/>
           </a:p>
@@ -20861,7 +20911,7 @@
           <a:p>
             <a:fld id="{663153EE-997E-48D6-BC05-B28D307B015C}" type="datetime1">
               <a:rPr lang="en-US" smtClean="0"/>
-              <a:t>10/1/2025</a:t>
+              <a:t>10/8/2026</a:t>
             </a:fld>
             <a:endParaRPr lang="en-US" dirty="0"/>
           </a:p>
@@ -21246,7 +21296,7 @@
           <a:p>
             <a:fld id="{E67CB83A-8CDA-4EB5-9F88-80628B7C644C}" type="datetime1">
               <a:rPr lang="en-US" smtClean="0"/>
-              <a:t>10/1/2025</a:t>
+              <a:t>10/8/2026</a:t>
             </a:fld>
             <a:endParaRPr lang="en-US" dirty="0"/>
           </a:p>
@@ -21534,7 +21584,7 @@
           <a:p>
             <a:fld id="{22FEB533-51F5-4A09-A69B-BDA5FA92A366}" type="datetime1">
               <a:rPr lang="en-US" smtClean="0"/>
-              <a:t>10/1/2025</a:t>
+              <a:t>10/8/2026</a:t>
             </a:fld>
             <a:endParaRPr lang="en-US" dirty="0"/>
           </a:p>
@@ -21745,7 +21795,7 @@
           <a:p>
             <a:fld id="{64819377-49A4-4FAF-9376-1B9935A96765}" type="datetime1">
               <a:rPr lang="en-US" smtClean="0"/>
-              <a:t>10/1/2025</a:t>
+              <a:t>10/8/2026</a:t>
             </a:fld>
             <a:endParaRPr lang="en-US" dirty="0"/>
           </a:p>
@@ -27417,8 +27467,44 @@
               <a:t>Facts: </a:t>
             </a:r>
             <a:r>
-              <a:rPr lang="en-US" sz="2000" dirty="0"/>
-              <a:t>Intraco was a creditor of City Carton and its subsidiary Box Pak. Both City Carton and Box Pak were controlled by a group of individuals who also controlled another company named Multi-Pak. Box Pak and Intraco could not pay Intraco, and so a complex transaction entailed in which Multi-Pak purchased City Carton’s debt for 2.3 million SGD, and Intraco subscribed for 2 million SGD worth of shares in Multi-Pak and lent Multi-Pak 371K SGD (debt-equity swap). Despite the debt-equity swap, however, both City Carton and Multi-Pak went bankrupt. The receivers of Multi-Pak argued that the directors of Multi-Pak breached their duty to act bona fide in the best interests of Multi-Pak in agreeing to purchase the City Carton debt from Intraco for 2.3 million SGD when it was clear that the debts owed to Intraco were worth only a fraction of the sum</a:t>
+              <a:rPr lang="en-US" sz="2000" dirty="0" err="1"/>
+              <a:t>Intraco</a:t>
+            </a:r>
+            <a:r>
+              <a:rPr lang="en-US" sz="2000" dirty="0"/>
+              <a:t> was owed money by two companies, City Carton and its subsidiary, Box Pak. Both companies were unable to repay their debts. The individuals who controlled these companies also controlled a third company, Multi-</a:t>
+            </a:r>
+            <a:r>
+              <a:rPr lang="en-US" sz="2000" dirty="0" err="1"/>
+              <a:t>Pak.To</a:t>
+            </a:r>
+            <a:r>
+              <a:rPr lang="en-US" sz="2000" dirty="0"/>
+              <a:t> resolve the problem, the parties agreed to a restructuring. Multi-Pak agreed to purchase City Carton's debt from </a:t>
+            </a:r>
+            <a:r>
+              <a:rPr lang="en-US" sz="2000" dirty="0" err="1"/>
+              <a:t>Intraco</a:t>
+            </a:r>
+            <a:r>
+              <a:rPr lang="en-US" sz="2000" dirty="0"/>
+              <a:t> for S$2.3 million. In return, </a:t>
+            </a:r>
+            <a:r>
+              <a:rPr lang="en-US" sz="2000" dirty="0" err="1"/>
+              <a:t>Intraco</a:t>
+            </a:r>
+            <a:r>
+              <a:rPr lang="en-US" sz="2000" dirty="0"/>
+              <a:t> agreed to invest S$2 million in Multi-Pak by subscribing for its shares and to lend Multi-Pak a further S$371,000.Unfortunately, the restructuring failed, and both City Carton and Multi-Pak subsequently became </a:t>
+            </a:r>
+            <a:r>
+              <a:rPr lang="en-US" sz="2000" dirty="0" err="1"/>
+              <a:t>insolvent.Multi</a:t>
+            </a:r>
+            <a:r>
+              <a:rPr lang="en-US" sz="2000" dirty="0"/>
+              <a:t>-Pak's receivers argued that its directors had breached their duty to act in the company's best interests. The central problem was that Multi-Pak had agreed to pay S$2.3 million for debts that were worth only a fraction of that amount. The receivers therefore argued that Multi-Pak's directors had acted improperly by using Multi-Pak's resources to rescue other companies controlled by the same individuals.</a:t>
             </a:r>
           </a:p>
         </p:txBody>
